--- a/materialien/Welt6_Zeitmaschine/1_Praesentation/KR_W6_Praesentation_Zeitmaschine.pptx
+++ b/materialien/Welt6_Zeitmaschine/1_Praesentation/KR_W6_Praesentation_Zeitmaschine.pptx
@@ -140,7 +140,7 @@
   <p:extLst>
     <p:ext uri="{521415D9-36F7-43E2-AB2F-B90AF26B5E84}">
       <p14:sectionLst xmlns:p14="http://schemas.microsoft.com/office/powerpoint/2010/main">
-        <p14:section name="Archivfund" id="{c0561e81-4021-1841-0b1d-e718aa6293f4}">
+        <p14:section name="Archivfund" id="{af4e9e7a-efa3-084e-776f-d64d7c2ca819}">
           <p14:sldIdLst>
             <p14:sldId id="256"/>
             <p14:sldId id="257"/>
@@ -150,7 +150,7 @@
             <p14:sldId id="261"/>
           </p14:sldIdLst>
         </p14:section>
-        <p14:section name="Fallenjagd" id="{38d39a97-a5cc-c5fe-7b37-809fb84883d7}">
+        <p14:section name="Fallenjagd" id="{a00c1336-5c17-ab4c-c20d-3b8d9d0e8caf}">
           <p14:sldIdLst>
             <p14:sldId id="262"/>
             <p14:sldId id="263"/>
@@ -168,7 +168,7 @@
             <p14:sldId id="275"/>
           </p14:sldIdLst>
         </p14:section>
-        <p14:section name="Eves Chiffre" id="{54654a8f-2ed3-11cf-08ff-f796983a5b15}">
+        <p14:section name="Eves Chiffre" id="{657861b3-8d70-6164-ec9d-fd854dd9ccaa}">
           <p14:sldIdLst>
             <p14:sldId id="276"/>
             <p14:sldId id="277"/>
@@ -177,7 +177,7 @@
             <p14:sldId id="280"/>
           </p14:sldIdLst>
         </p14:section>
-        <p14:section name="Generalprobe" id="{f7ac5101-8899-3a85-e4a1-b9c5f8b8e876}">
+        <p14:section name="Generalprobe" id="{23a5cdf5-956e-4460-ed04-0996fc5c1e7e}">
           <p14:sldIdLst>
             <p14:sldId id="281"/>
             <p14:sldId id="282"/>
@@ -189,7 +189,7 @@
             <p14:sldId id="288"/>
           </p14:sldIdLst>
         </p14:section>
-        <p14:section name="Ausblick" id="{5cb82616-ee14-4639-603e-0c5c6a5a2b30}">
+        <p14:section name="Ausblick" id="{5e6a5508-c9bf-ae61-1265-8f1f9cd456dd}">
           <p14:sldIdLst>
             <p14:sldId id="289"/>
           </p14:sldIdLst>

--- a/materialien/Welt6_Zeitmaschine/1_Praesentation/KR_W6_Praesentation_Zeitmaschine.pptx
+++ b/materialien/Welt6_Zeitmaschine/1_Praesentation/KR_W6_Praesentation_Zeitmaschine.pptx
@@ -140,7 +140,7 @@
   <p:extLst>
     <p:ext uri="{521415D9-36F7-43E2-AB2F-B90AF26B5E84}">
       <p14:sectionLst xmlns:p14="http://schemas.microsoft.com/office/powerpoint/2010/main">
-        <p14:section name="Archivfund" id="{af4e9e7a-efa3-084e-776f-d64d7c2ca819}">
+        <p14:section name="Archivfund" id="{af39e2f4-c561-a25b-f31b-8b0337b15f61}">
           <p14:sldIdLst>
             <p14:sldId id="256"/>
             <p14:sldId id="257"/>
@@ -150,7 +150,7 @@
             <p14:sldId id="261"/>
           </p14:sldIdLst>
         </p14:section>
-        <p14:section name="Fallenjagd" id="{a00c1336-5c17-ab4c-c20d-3b8d9d0e8caf}">
+        <p14:section name="Fallenjagd" id="{f8b98800-e647-6f59-0a09-717f187ee61a}">
           <p14:sldIdLst>
             <p14:sldId id="262"/>
             <p14:sldId id="263"/>
@@ -168,7 +168,7 @@
             <p14:sldId id="275"/>
           </p14:sldIdLst>
         </p14:section>
-        <p14:section name="Eves Chiffre" id="{657861b3-8d70-6164-ec9d-fd854dd9ccaa}">
+        <p14:section name="Eves Chiffre" id="{7745ff7b-2f0f-1b37-e856-0ef3b15a3350}">
           <p14:sldIdLst>
             <p14:sldId id="276"/>
             <p14:sldId id="277"/>
@@ -177,7 +177,7 @@
             <p14:sldId id="280"/>
           </p14:sldIdLst>
         </p14:section>
-        <p14:section name="Generalprobe" id="{23a5cdf5-956e-4460-ed04-0996fc5c1e7e}">
+        <p14:section name="Generalprobe" id="{3a70f63b-3d30-b643-6d24-8cf4fb2c6adf}">
           <p14:sldIdLst>
             <p14:sldId id="281"/>
             <p14:sldId id="282"/>
@@ -189,7 +189,7 @@
             <p14:sldId id="288"/>
           </p14:sldIdLst>
         </p14:section>
-        <p14:section name="Ausblick" id="{5e6a5508-c9bf-ae61-1265-8f1f9cd456dd}">
+        <p14:section name="Ausblick" id="{a5dd395d-b4fa-96a0-e1af-210e7c80564a}">
           <p14:sldIdLst>
             <p14:sldId id="289"/>
           </p14:sldIdLst>
@@ -30351,7 +30351,7 @@
                           <a:ea typeface="Consolas" pitchFamily="34" charset="-122"/>
                           <a:cs typeface="Consolas" pitchFamily="34" charset="-120"/>
                         </a:rPr>
-                        <a:t>0 5 2 7 4 1 6 3</a:t>
+                        <a:t>?</a:t>
                       </a:r>
                       <a:endParaRPr lang="en-US" sz="1600" dirty="0">
                         <a:latin typeface="Calibri" charset="0"/>
@@ -30489,7 +30489,7 @@
                           <a:ea typeface="Consolas" pitchFamily="34" charset="-122"/>
                           <a:cs typeface="Consolas" pitchFamily="34" charset="-120"/>
                         </a:rPr>
-                        <a:t>0 7 6 5 4 3 2 1</a:t>
+                        <a:t>?</a:t>
                       </a:r>
                       <a:endParaRPr lang="en-US" sz="1600" dirty="0">
                         <a:latin typeface="Calibri" charset="0"/>

--- a/materialien/Welt6_Zeitmaschine/1_Praesentation/KR_W6_Praesentation_Zeitmaschine.pptx
+++ b/materialien/Welt6_Zeitmaschine/1_Praesentation/KR_W6_Praesentation_Zeitmaschine.pptx
@@ -140,7 +140,7 @@
   <p:extLst>
     <p:ext uri="{521415D9-36F7-43E2-AB2F-B90AF26B5E84}">
       <p14:sectionLst xmlns:p14="http://schemas.microsoft.com/office/powerpoint/2010/main">
-        <p14:section name="Archivfund" id="{af39e2f4-c561-a25b-f31b-8b0337b15f61}">
+        <p14:section name="Archivfund" id="{8181b899-1a29-00e9-fe2e-38e8fac506b4}">
           <p14:sldIdLst>
             <p14:sldId id="256"/>
             <p14:sldId id="257"/>
@@ -150,7 +150,7 @@
             <p14:sldId id="261"/>
           </p14:sldIdLst>
         </p14:section>
-        <p14:section name="Fallenjagd" id="{f8b98800-e647-6f59-0a09-717f187ee61a}">
+        <p14:section name="Fallenjagd" id="{bb25f812-5aa7-00dc-c634-a60dfe87ba1c}">
           <p14:sldIdLst>
             <p14:sldId id="262"/>
             <p14:sldId id="263"/>
@@ -168,7 +168,7 @@
             <p14:sldId id="275"/>
           </p14:sldIdLst>
         </p14:section>
-        <p14:section name="Eves Chiffre" id="{7745ff7b-2f0f-1b37-e856-0ef3b15a3350}">
+        <p14:section name="Eves Chiffre" id="{cac4edb4-e18c-8472-3905-43358a4b95e9}">
           <p14:sldIdLst>
             <p14:sldId id="276"/>
             <p14:sldId id="277"/>
@@ -177,7 +177,7 @@
             <p14:sldId id="280"/>
           </p14:sldIdLst>
         </p14:section>
-        <p14:section name="Generalprobe" id="{3a70f63b-3d30-b643-6d24-8cf4fb2c6adf}">
+        <p14:section name="Generalprobe" id="{978b88e7-fc32-5348-f721-1dfdb8c7fe1e}">
           <p14:sldIdLst>
             <p14:sldId id="281"/>
             <p14:sldId id="282"/>
@@ -189,7 +189,7 @@
             <p14:sldId id="288"/>
           </p14:sldIdLst>
         </p14:section>
-        <p14:section name="Ausblick" id="{a5dd395d-b4fa-96a0-e1af-210e7c80564a}">
+        <p14:section name="Ausblick" id="{17287100-4f46-a2f8-e7ae-1dbbaa9de65a}">
           <p14:sldIdLst>
             <p14:sldId id="289"/>
           </p14:sldIdLst>
@@ -1566,7 +1566,7 @@
           <a:p>
             <a:r>
               <a:rPr lang="en-US" dirty="0"/>
-              <a:t>2 min. Story vorlesen: „Das Archiv ist still geworden. Das Chronoskop, das dich durch zweieinhalb Jahrtausende Geheimschriften getragen hat, rührt sich nicht mehr: Auf seinem Ziffernring leuchtet nur noch eine einzige Zeile. Eve hat die Zeitmaschine mit einer eigenen Chiffre verriegelt, ihrem ‚Uhrwerk‘.“ Impuls: „Was wisst ihr, was fehlt?“ Erwartet: Verfahren + Schlüssel. Kerckhoffs erinnern: Das Verfahren darf bekannt sein (Eves Beschreibung liegt im Archiv) – geheim ist nur der Schlüssel. Lösung (nicht verraten): zeitreisebeendet, t = 3, Pendelwort UHR.</a:t>
+              <a:t>2 min. Story vorlesen: „Das Archiv ist still geworden. Das Chronoskop, das dich durch zweieinhalb Jahrtausende Geheimschriften getragen hat, rührt sich nicht mehr: Auf seinem Ziffernring leuchtet nur noch eine einzige Zeile. Eve hat die Zeitmaschine mit einer eigenen Chiffre verriegelt, ihrem ‚Uhrwerk‘.“ Impuls: „Was wisst ihr, was fehlt?“ Erwartet: Verfahren + Schlüssel. Kerckhoffs erinnern: Das Verfahren darf bekannt sein (Eves Beschreibung liegt im Archiv) – geheim ist nur der Schlüssel. Lösung (nicht verraten): hebelistverbogen, t = 3, Pendelwort UHR.</a:t>
             </a:r>
             <a:endParaRPr lang="en-US" dirty="0"/>
           </a:p>
@@ -1830,7 +1830,7 @@
           <a:p>
             <a:r>
               <a:rPr lang="en-US" dirty="0"/>
-              <a:t>35 min. Material: Archivwissen 1 der Akte W6·2 (im Abitur-Stil), WK2, WK3, Ring-Schablone im Anhang. Langsame Lernende: Pendelzeile UHRHUHRH… vorgeben. Kontrollwerte: Auftrag 2 → zeitreisebeendet; Auftrag 3 → RAVFZ EKTUU AIXIR H. Häufigste Fehler: Zeichen j auf Feld j zurücklegen statt auf Feld (t · j) mod 8 (P3); Pendel mit doppelten Enden (P4).</a:t>
+              <a:t>35 min. Material: Archivwissen 1 der Akte W6·2 (im Abitur-Stil), WK2, WK3, Ring-Schablone im Anhang. Langsame Lernende: Pendelzeile UHRHUHRH… vorgeben. Kontrollwerte: Auftrag 2 → hebelistverbogen; Auftrag 3 → RAVFZ EKTUU AIXIR H. Häufigste Fehler: Zeichen j auf Feld j zurücklegen statt auf Feld (t · j) mod 8 (P3); Pendel mit doppelten Enden (P4).</a:t>
             </a:r>
             <a:endParaRPr lang="en-US" dirty="0"/>
           </a:p>
@@ -1918,7 +1918,7 @@
           <a:p>
             <a:r>
               <a:rPr lang="en-US" dirty="0"/>
-              <a:t>3 min. Sicherung am Ende von DS 17. Archivfund auflösen: ZTIERSIE EEEBNTED → Ring zurück → zeitreisebeendet. Das Chronoskop ist entriegelt.</a:t>
+              <a:t>3 min. Sicherung am Ende von DS 17. Archivfund auflösen: HESELTBI VBEEONRG → Ring zurück → hebelistverbogen. Das Chronoskop ist entriegelt.</a:t>
             </a:r>
             <a:endParaRPr lang="en-US" dirty="0"/>
           </a:p>
@@ -12360,7 +12360,7 @@
                 <a:ea typeface="Consolas" pitchFamily="34" charset="-122"/>
                 <a:cs typeface="Consolas" pitchFamily="34" charset="-120"/>
               </a:rPr>
-              <a:t>TAZLL ZZLYL VIHAV K</a:t>
+              <a:t>BLJLF ASPPI VLIUI N</a:t>
             </a:r>
             <a:endParaRPr lang="en-US" sz="3000" dirty="0"/>
           </a:p>

--- a/materialien/Welt6_Zeitmaschine/1_Praesentation/KR_W6_Praesentation_Zeitmaschine.pptx
+++ b/materialien/Welt6_Zeitmaschine/1_Praesentation/KR_W6_Praesentation_Zeitmaschine.pptx
@@ -140,7 +140,7 @@
   <p:extLst>
     <p:ext uri="{521415D9-36F7-43E2-AB2F-B90AF26B5E84}">
       <p14:sectionLst xmlns:p14="http://schemas.microsoft.com/office/powerpoint/2010/main">
-        <p14:section name="Archivfund" id="{8181b899-1a29-00e9-fe2e-38e8fac506b4}">
+        <p14:section name="Archivfund" id="{45337c67-e5ac-140d-c6f5-99dd8de0c2ff}">
           <p14:sldIdLst>
             <p14:sldId id="256"/>
             <p14:sldId id="257"/>
@@ -150,7 +150,7 @@
             <p14:sldId id="261"/>
           </p14:sldIdLst>
         </p14:section>
-        <p14:section name="Fallenjagd" id="{bb25f812-5aa7-00dc-c634-a60dfe87ba1c}">
+        <p14:section name="Fallenjagd" id="{99b46448-6927-d57e-462a-ca12705693c7}">
           <p14:sldIdLst>
             <p14:sldId id="262"/>
             <p14:sldId id="263"/>
@@ -168,7 +168,7 @@
             <p14:sldId id="275"/>
           </p14:sldIdLst>
         </p14:section>
-        <p14:section name="Eves Chiffre" id="{cac4edb4-e18c-8472-3905-43358a4b95e9}">
+        <p14:section name="Eves Chiffre" id="{8a8d332f-03fb-44d7-020e-cbd40928cef5}">
           <p14:sldIdLst>
             <p14:sldId id="276"/>
             <p14:sldId id="277"/>
@@ -177,7 +177,7 @@
             <p14:sldId id="280"/>
           </p14:sldIdLst>
         </p14:section>
-        <p14:section name="Generalprobe" id="{978b88e7-fc32-5348-f721-1dfdb8c7fe1e}">
+        <p14:section name="Generalprobe" id="{decc1ba5-5179-0f9f-7f9c-0adffec8b7c9}">
           <p14:sldIdLst>
             <p14:sldId id="281"/>
             <p14:sldId id="282"/>
@@ -189,7 +189,7 @@
             <p14:sldId id="288"/>
           </p14:sldIdLst>
         </p14:section>
-        <p14:section name="Ausblick" id="{17287100-4f46-a2f8-e7ae-1dbbaa9de65a}">
+        <p14:section name="Ausblick" id="{85211531-745b-7da4-55e9-065921147f8f}">
           <p14:sldIdLst>
             <p14:sldId id="289"/>
           </p14:sldIdLst>
@@ -1214,7 +1214,7 @@
           <a:p>
             <a:r>
               <a:rPr lang="en-US" dirty="0"/>
-              <a:t>1 min. Aus Lab W6-L1-09. Bei n(n − 1) wird jedes Paar doppelt gezählt (A–B und B–A). Vergleich: Ab n = 6 braucht asymmetrisch weniger Schlüssel, bei n = 5 gleich viele (10). Schwache Schlüssel: k = 0, „AAAA“, Ringschritt t = 1.</a:t>
+              <a:t>1 min. Lab W6-L1-09 fragt seit Korrektur D18 nach Schlüsselwörtern aus drei verschiedenen Buchstaben (26 · 25 · 24 = 15 600) – hier nicht vorrechnen. Bei n(n − 1) wird jedes Paar doppelt gezählt (A–B und B–A). Vergleich: Ab n = 6 braucht asymmetrisch weniger Schlüssel, bei n = 5 gleich viele (10). Schwache Schlüssel: k = 0, „AAAA“, Ringschritt t = 1.</a:t>
             </a:r>
             <a:endParaRPr lang="en-US" dirty="0"/>
           </a:p>
